--- a/ws02/class/ws02_slide_class2.pptx
+++ b/ws02/class/ws02_slide_class2.pptx
@@ -367,11 +367,7 @@
             <a:noAutofit/>
           </a:bodyPr>
           <a:lstStyle/>
-          <a:p>
-            <a:r>
-              <a:t>슬롯2 시작. OWASP 시각으로 위협을 다시 정리합니다.</a:t>
-            </a:r>
-          </a:p>
+          <a:p/>
         </p:txBody>
       </p:sp>
     </p:spTree>
@@ -425,11 +421,7 @@
         <p:txBody>
           <a:bodyPr/>
           <a:lstStyle/>
-          <a:p>
-            <a:r>
-              <a:t>2023년 삼성 3건 연속. 직원이 자기 손으로 외부 LLM 에 — 가장 흔한 유출 패턴.</a:t>
-            </a:r>
-          </a:p>
+          <a:p/>
         </p:txBody>
       </p:sp>
       <p:sp>
@@ -511,11 +503,7 @@
         <p:txBody>
           <a:bodyPr/>
           <a:lstStyle/>
-          <a:p>
-            <a:r>
-              <a:t>딥시크 100만 건 비암호화 노출, Meta GDPR 1.2B 벌금. 데이터가 어디서 처리되는가 — 법적 결과까지.</a:t>
-            </a:r>
-          </a:p>
+          <a:p/>
         </p:txBody>
       </p:sp>
       <p:sp>
@@ -597,76 +585,7 @@
         <p:txBody>
           <a:bodyPr/>
           <a:lstStyle/>
-          <a:p>
-            <a:r>
-              <a:rPr dirty="0"/>
-              <a:t>Hugging Face </a:t>
-            </a:r>
-            <a:r>
-              <a:rPr dirty="0" err="1"/>
-              <a:t>악성</a:t>
-            </a:r>
-            <a:r>
-              <a:rPr dirty="0"/>
-              <a:t> </a:t>
-            </a:r>
-            <a:r>
-              <a:rPr dirty="0" err="1"/>
-              <a:t>모델</a:t>
-            </a:r>
-            <a:r>
-              <a:rPr dirty="0"/>
-              <a:t> 100개+. pickle </a:t>
-            </a:r>
-            <a:r>
-              <a:rPr dirty="0" err="1"/>
-              <a:t>역직렬화로</a:t>
-            </a:r>
-            <a:r>
-              <a:rPr dirty="0"/>
-              <a:t> </a:t>
-            </a:r>
-            <a:r>
-              <a:rPr dirty="0" err="1"/>
-              <a:t>다운로드만</a:t>
-            </a:r>
-            <a:r>
-              <a:rPr dirty="0"/>
-              <a:t> </a:t>
-            </a:r>
-            <a:r>
-              <a:rPr dirty="0" err="1"/>
-              <a:t>해도</a:t>
-            </a:r>
-            <a:r>
-              <a:rPr dirty="0"/>
-              <a:t> </a:t>
-            </a:r>
-            <a:r>
-              <a:rPr dirty="0" err="1"/>
-              <a:t>코드</a:t>
-            </a:r>
-            <a:r>
-              <a:rPr dirty="0"/>
-              <a:t> </a:t>
-            </a:r>
-            <a:r>
-              <a:rPr dirty="0" err="1"/>
-              <a:t>실행</a:t>
-            </a:r>
-            <a:r>
-              <a:rPr dirty="0"/>
-              <a:t> </a:t>
-            </a:r>
-            <a:r>
-              <a:rPr dirty="0" err="1"/>
-              <a:t>가능</a:t>
-            </a:r>
-            <a:r>
-              <a:rPr dirty="0"/>
-              <a:t>.</a:t>
-            </a:r>
-          </a:p>
+          <a:p/>
         </p:txBody>
       </p:sp>
       <p:sp>
@@ -748,11 +667,7 @@
         <p:txBody>
           <a:bodyPr/>
           <a:lstStyle/>
-          <a:p>
-            <a:r>
-              <a:t>Ollama RCE 사례 — AI 인프라 도구도 전통 SW 와 같은 공급망 검증 필요. 새 도구라고 안전한 게 아닙니다.</a:t>
-            </a:r>
-          </a:p>
+          <a:p/>
         </p:txBody>
       </p:sp>
       <p:sp>
@@ -834,11 +749,7 @@
         <p:txBody>
           <a:bodyPr/>
           <a:lstStyle/>
-          <a:p>
-            <a:r>
-              <a:t>마이크로소프트 Tay (2016) — 24시간 만에 혐오 콘텐츠 생성. 실시간 재학습 구조의 함정.</a:t>
-            </a:r>
-          </a:p>
+          <a:p/>
         </p:txBody>
       </p:sp>
       <p:sp>
@@ -920,88 +831,7 @@
         <p:txBody>
           <a:bodyPr/>
           <a:lstStyle/>
-          <a:p>
-            <a:r>
-              <a:rPr dirty="0" err="1"/>
-              <a:t>공장</a:t>
-            </a:r>
-            <a:r>
-              <a:rPr dirty="0"/>
-              <a:t> </a:t>
-            </a:r>
-            <a:r>
-              <a:rPr dirty="0" err="1"/>
-              <a:t>출하</a:t>
-            </a:r>
-            <a:r>
-              <a:rPr dirty="0"/>
-              <a:t> </a:t>
-            </a:r>
-            <a:r>
-              <a:rPr dirty="0" err="1"/>
-              <a:t>단계</a:t>
-            </a:r>
-            <a:r>
-              <a:rPr dirty="0"/>
-              <a:t> </a:t>
-            </a:r>
-            <a:r>
-              <a:rPr dirty="0" err="1"/>
-              <a:t>백도어</a:t>
-            </a:r>
-            <a:r>
-              <a:rPr dirty="0"/>
-              <a:t>. T14 → T03 → </a:t>
-            </a:r>
-            <a:r>
-              <a:rPr dirty="0" err="1"/>
-              <a:t>트리거</a:t>
-            </a:r>
-            <a:r>
-              <a:rPr dirty="0"/>
-              <a:t> </a:t>
-            </a:r>
-            <a:r>
-              <a:rPr dirty="0" err="1"/>
-              <a:t>작동</a:t>
-            </a:r>
-            <a:r>
-              <a:rPr dirty="0"/>
-              <a:t> — </a:t>
-            </a:r>
-            <a:r>
-              <a:rPr dirty="0" err="1"/>
-              <a:t>정기</a:t>
-            </a:r>
-            <a:r>
-              <a:rPr dirty="0"/>
-              <a:t> </a:t>
-            </a:r>
-            <a:r>
-              <a:rPr dirty="0" err="1"/>
-              <a:t>검사로</a:t>
-            </a:r>
-            <a:r>
-              <a:rPr dirty="0"/>
-              <a:t> </a:t>
-            </a:r>
-            <a:r>
-              <a:rPr dirty="0" err="1"/>
-              <a:t>탐지</a:t>
-            </a:r>
-            <a:r>
-              <a:rPr dirty="0"/>
-              <a:t> </a:t>
-            </a:r>
-            <a:r>
-              <a:rPr dirty="0" err="1"/>
-              <a:t>불가</a:t>
-            </a:r>
-            <a:r>
-              <a:rPr dirty="0"/>
-              <a:t>.</a:t>
-            </a:r>
-          </a:p>
+          <a:p/>
         </p:txBody>
       </p:sp>
       <p:sp>
@@ -1083,11 +913,7 @@
         <p:txBody>
           <a:bodyPr/>
           <a:lstStyle/>
-          <a:p>
-            <a:r>
-              <a:t>Hugging Face 악성 모델 100건+ — 모델 출처 검증 없이 도입하면 공급망 = 백도어 직결.</a:t>
-            </a:r>
-          </a:p>
+          <a:p/>
         </p:txBody>
       </p:sp>
       <p:sp>
@@ -1169,11 +995,7 @@
         <p:txBody>
           <a:bodyPr/>
           <a:lstStyle/>
-          <a:p>
-            <a:r>
-              <a:t>LLM05 는 위협 분류가 아니라 개발자 코딩 실수. AI 출력을 그대로 렌더링하면 XSS·SQL·RCE 로 이어집니다.</a:t>
-            </a:r>
-          </a:p>
+          <a:p/>
         </p:txBody>
       </p:sp>
       <p:sp>
@@ -1255,11 +1077,7 @@
         <p:txBody>
           <a:bodyPr/>
           <a:lstStyle/>
-          <a:p>
-            <a:r>
-              <a:t>인젝션 + 권한 남용 연계 — Agent 가 진짜 위험한 이유. 본격 다룸은 4일차.</a:t>
-            </a:r>
-          </a:p>
+          <a:p/>
         </p:txBody>
       </p:sp>
       <p:sp>
@@ -1341,11 +1159,7 @@
         <p:txBody>
           <a:bodyPr/>
           <a:lstStyle/>
-          <a:p>
-            <a:r>
-              <a:t>Replit AI 가 사용자 DB 삭제 — Agent 에 과도한 권한 = 시스템 파괴 위험. 최소 권한 원칙이 답.</a:t>
-            </a:r>
-          </a:p>
+          <a:p/>
         </p:txBody>
       </p:sp>
       <p:sp>
@@ -1428,26 +1242,6 @@
           <a:bodyPr/>
           <a:lstStyle/>
           <a:p>
-            <a:r>
-              <a:rPr lang="en-US" dirty="0"/>
-              <a:t>OWASP Gen AI </a:t>
-            </a:r>
-            <a:r>
-              <a:rPr lang="ko-KR" altLang="en-US" dirty="0"/>
-              <a:t>가 공개한 </a:t>
-            </a:r>
-            <a:r>
-              <a:rPr lang="en-US" dirty="0"/>
-              <a:t>LLM Top 10 — </a:t>
-            </a:r>
-            <a:r>
-              <a:rPr lang="ko-KR" altLang="en-US" dirty="0"/>
-              <a:t>본인 업무에 그대로 가져갈 수 있는 가장 실용적인 한 페이지</a:t>
-            </a:r>
-            <a:r>
-              <a:rPr lang="en-US" altLang="ko-KR" dirty="0"/>
-              <a:t>.</a:t>
-            </a:r>
             <a:endParaRPr dirty="0"/>
           </a:p>
         </p:txBody>
@@ -1531,11 +1325,7 @@
         <p:txBody>
           <a:bodyPr/>
           <a:lstStyle/>
-          <a:p>
-            <a:r>
-              <a:t>시스템 프롬프트 = AI 의 비밀 지령. Bing Sydney 사례 — 한 줄 프롬프트로 전체 노출. NIS 가 못 보던 영역.</a:t>
-            </a:r>
-          </a:p>
+          <a:p/>
         </p:txBody>
       </p:sp>
       <p:sp>
@@ -1617,11 +1407,7 @@
         <p:txBody>
           <a:bodyPr/>
           <a:lstStyle/>
-          <a:p>
-            <a:r>
-              <a:t>RAG 의 새 공격면 — 오염 / 역추출 / 권한 우회 3가지. 슬롯5 Lab 2 에서 직접 시연.</a:t>
-            </a:r>
-          </a:p>
+          <a:p/>
         </p:txBody>
       </p:sp>
       <p:sp>
@@ -1703,11 +1489,7 @@
         <p:txBody>
           <a:bodyPr/>
           <a:lstStyle/>
-          <a:p>
-            <a:r>
-              <a:t>RAG = "LLM 보안 = 프롬프트 방어" 라는 오해를 무너뜨림. 데이터·인프라·공급망 전 구간 방어 필요.</a:t>
-            </a:r>
-          </a:p>
+          <a:p/>
         </p:txBody>
       </p:sp>
       <p:sp>
@@ -1789,11 +1571,7 @@
         <p:txBody>
           <a:bodyPr/>
           <a:lstStyle/>
-          <a:p>
-            <a:r>
-              <a:t>군 지식베이스 RAG 연동 시 — 문서 하나 오염이 모든 쿼리에 영향. 출처·권한·감사·암호화 4가지.</a:t>
-            </a:r>
-          </a:p>
+          <a:p/>
         </p:txBody>
       </p:sp>
       <p:sp>
@@ -1875,11 +1653,7 @@
         <p:txBody>
           <a:bodyPr/>
           <a:lstStyle/>
-          <a:p>
-            <a:r>
-              <a:t>"틀렸다는 걸 AI 자신도 모름". Mata v. Avianca, Air Canada 챗봇 — 군 AI 에선 더 치명적. 인간 검증 의무화.</a:t>
-            </a:r>
-          </a:p>
+          <a:p/>
         </p:txBody>
       </p:sp>
       <p:sp>
@@ -1961,11 +1735,7 @@
         <p:txBody>
           <a:bodyPr/>
           <a:lstStyle/>
-          <a:p>
-            <a:r>
-              <a:t>Prompt Flooding · Sponge · RAG Overload — 위기 상황 AI 마비가 가장 위험한 순간.</a:t>
-            </a:r>
-          </a:p>
+          <a:p/>
         </p:txBody>
       </p:sp>
       <p:sp>
@@ -2047,11 +1817,7 @@
         <p:txBody>
           <a:bodyPr/>
           <a:lstStyle/>
-          <a:p>
-            <a:r>
-              <a:t>NIS 가 못 보는 3종 — LLM05·07·09. 위협 분류 체계 바깥의 구현·신뢰성 이슈.</a:t>
-            </a:r>
-          </a:p>
+          <a:p/>
         </p:txBody>
       </p:sp>
       <p:sp>
@@ -2133,11 +1899,7 @@
         <p:txBody>
           <a:bodyPr/>
           <a:lstStyle/>
-          <a:p>
-            <a:r>
-              <a:t>같은 인젝션을 NIS=식별 / KISA=책임 / OWASP=구현 — 세 언어로 동시 적용해야 완전한 사이클.</a:t>
-            </a:r>
-          </a:p>
+          <a:p/>
         </p:txBody>
       </p:sp>
       <p:sp>
@@ -2219,11 +1981,7 @@
         <p:txBody>
           <a:bodyPr/>
           <a:lstStyle/>
-          <a:p>
-            <a:r>
-              <a:t>NIS 30개 = 위협별 체크리스트, OWASP = 구현 레시피. 양쪽 다 필요합니다.</a:t>
-            </a:r>
-          </a:p>
+          <a:p/>
         </p:txBody>
       </p:sp>
       <p:sp>
@@ -2323,11 +2081,7 @@
         <p:txBody>
           <a:bodyPr/>
           <a:lstStyle/>
-          <a:p>
-            <a:r>
-              <a:t>NIS → KISA → OWASP 순서. 한 프레임워크만으론 공백 발생. LLM09 환각은 인간 검증이 답.</a:t>
-            </a:r>
-          </a:p>
+          <a:p/>
         </p:txBody>
       </p:sp>
       <p:sp>
@@ -2415,11 +2169,7 @@
         <p:txBody>
           <a:bodyPr/>
           <a:lstStyle/>
-          <a:p>
-            <a:r>
-              <a:t>NIS 가 "어떤 위협이 있는가" 였다면, OWASP 는 "코드에서 어떻게 막는가". 두 가이드를 함께 써야 완전합니다.</a:t>
-            </a:r>
-          </a:p>
+          <a:p/>
         </p:txBody>
       </p:sp>
       <p:sp>
@@ -2501,11 +2251,7 @@
         <p:txBody>
           <a:bodyPr/>
           <a:lstStyle/>
-          <a:p>
-            <a:r>
-              <a:t>K-AISecMap (k-ai-sec.streamlit.app) 으로 매핑 시각화, Google SAIF 6원칙으로 구현 검증.</a:t>
-            </a:r>
-          </a:p>
+          <a:p/>
         </p:txBody>
       </p:sp>
       <p:sp>
@@ -2587,11 +2333,7 @@
         <p:txBody>
           <a:bodyPr/>
           <a:lstStyle/>
-          <a:p>
-            <a:r>
-              <a:t>우크라이나 국방부 23만 명 식별 — 민간 데이터가 전장 무기. 우리 군인 SNS 사진도 동일하게 악용 가능.</a:t>
-            </a:r>
-          </a:p>
+          <a:p/>
         </p:txBody>
       </p:sp>
       <p:sp>
@@ -2726,11 +2468,7 @@
             <a:noAutofit/>
           </a:bodyPr>
           <a:lstStyle/>
-          <a:p>
-            <a:r>
-              <a:t>점심 식사 후 슬롯3 — 이제 직접 공격해봅니다.</a:t>
-            </a:r>
-          </a:p>
+          <a:p/>
         </p:txBody>
       </p:sp>
     </p:spTree>
@@ -2784,11 +2522,7 @@
         <p:txBody>
           <a:bodyPr/>
           <a:lstStyle/>
-          <a:p>
-            <a:r>
-              <a:t>LLM01–10 ↔ NIS T코드 매핑 한 장. NIS 가 커버 못 하는 3종 — LLM05·07·09 — 가 오늘 강조할 공백.</a:t>
-            </a:r>
-          </a:p>
+          <a:p/>
         </p:txBody>
       </p:sp>
       <p:sp>
@@ -2870,11 +2604,7 @@
         <p:txBody>
           <a:bodyPr/>
           <a:lstStyle/>
-          <a:p>
-            <a:r>
-              <a:t>슬롯3 Gandalf 챌린지에서 여러분이 직접 체험할 위협. 직접·간접 두 형태 구분이 핵심.</a:t>
-            </a:r>
-          </a:p>
+          <a:p/>
         </p:txBody>
       </p:sp>
       <p:sp>
@@ -2956,96 +2686,7 @@
         <p:txBody>
           <a:bodyPr/>
           <a:lstStyle/>
-          <a:p>
-            <a:r>
-              <a:rPr dirty="0" err="1"/>
-              <a:t>가중치가</a:t>
-            </a:r>
-            <a:r>
-              <a:rPr dirty="0"/>
-              <a:t> </a:t>
-            </a:r>
-            <a:r>
-              <a:rPr dirty="0" err="1"/>
-              <a:t>안</a:t>
-            </a:r>
-            <a:r>
-              <a:rPr dirty="0"/>
-              <a:t> </a:t>
-            </a:r>
-            <a:r>
-              <a:rPr dirty="0" err="1"/>
-              <a:t>바뀌어도</a:t>
-            </a:r>
-            <a:r>
-              <a:rPr dirty="0"/>
-              <a:t> AI </a:t>
-            </a:r>
-            <a:r>
-              <a:rPr dirty="0" err="1"/>
-              <a:t>출력은</a:t>
-            </a:r>
-            <a:r>
-              <a:rPr dirty="0"/>
-              <a:t> </a:t>
-            </a:r>
-            <a:r>
-              <a:rPr dirty="0" err="1"/>
-              <a:t>바뀝니다</a:t>
-            </a:r>
-            <a:r>
-              <a:rPr dirty="0"/>
-              <a:t>. </a:t>
-            </a:r>
-            <a:r>
-              <a:rPr dirty="0" err="1"/>
-              <a:t>RAG·시스템</a:t>
-            </a:r>
-            <a:r>
-              <a:rPr dirty="0"/>
-              <a:t> </a:t>
-            </a:r>
-            <a:r>
-              <a:rPr dirty="0" err="1"/>
-              <a:t>프롬프트·도구</a:t>
-            </a:r>
-            <a:r>
-              <a:rPr dirty="0"/>
-              <a:t> </a:t>
-            </a:r>
-            <a:r>
-              <a:rPr dirty="0" err="1"/>
-              <a:t>연결이</a:t>
-            </a:r>
-            <a:r>
-              <a:rPr dirty="0"/>
-              <a:t> </a:t>
-            </a:r>
-            <a:r>
-              <a:rPr dirty="0" err="1"/>
-              <a:t>모두</a:t>
-            </a:r>
-            <a:r>
-              <a:rPr dirty="0"/>
-              <a:t> </a:t>
-            </a:r>
-            <a:r>
-              <a:rPr dirty="0" err="1"/>
-              <a:t>새</a:t>
-            </a:r>
-            <a:r>
-              <a:rPr dirty="0"/>
-              <a:t> </a:t>
-            </a:r>
-            <a:r>
-              <a:rPr dirty="0" err="1"/>
-              <a:t>공격면</a:t>
-            </a:r>
-            <a:r>
-              <a:rPr dirty="0"/>
-              <a:t>.</a:t>
-            </a:r>
-          </a:p>
+          <a:p/>
         </p:txBody>
       </p:sp>
       <p:sp>
@@ -3127,11 +2768,7 @@
         <p:txBody>
           <a:bodyPr/>
           <a:lstStyle/>
-          <a:p>
-            <a:r>
-              <a:t>프롬프트 인젝션은 버그가 아니라 구조적 한계. Transformer Self-Attention 의 본질적 약점입니다.</a:t>
-            </a:r>
-          </a:p>
+          <a:p/>
         </p:txBody>
       </p:sp>
       <p:sp>
@@ -3213,11 +2850,7 @@
         <p:txBody>
           <a:bodyPr/>
           <a:lstStyle/>
-          <a:p>
-            <a:r>
-              <a:t>GM 딜러 → EchoLeak → Promptware — 직접 / 제로클릭 / 미수락 트리거 순으로 진화.</a:t>
-            </a:r>
-          </a:p>
+          <a:p/>
         </p:txBody>
       </p:sp>
       <p:sp>
@@ -3299,11 +2932,7 @@
         <p:txBody>
           <a:bodyPr/>
           <a:lstStyle/>
-          <a:p>
-            <a:r>
-              <a:t>입력 → 학습 경로와 응답 직접 유출 두 가지. 의도가 아니라 구조의 문제.</a:t>
-            </a:r>
-          </a:p>
+          <a:p/>
         </p:txBody>
       </p:sp>
       <p:sp>

--- a/ws02/class/ws02_slide_class2.pptx
+++ b/ws02/class/ws02_slide_class2.pptx
@@ -272,7 +272,7 @@
 </file>
 
 <file path=ppt/notesSlides/notesSlide1.xml><?xml version="1.0" encoding="utf-8"?>
-<p:notes xmlns:a="http://schemas.openxmlformats.org/drawingml/2006/main" xmlns:r="http://schemas.openxmlformats.org/officeDocument/2006/relationships" xmlns:p="http://schemas.openxmlformats.org/presentationml/2006/main" showMasterSp="0" showMasterPhAnim="0">
+<p:notes xmlns:a="http://schemas.openxmlformats.org/drawingml/2006/main" xmlns:p="http://schemas.openxmlformats.org/presentationml/2006/main" showMasterSp="0" showMasterPhAnim="0">
   <p:cSld>
     <p:spTree>
       <p:nvGrpSpPr>
@@ -367,7 +367,9 @@
             <a:noAutofit/>
           </a:bodyPr>
           <a:lstStyle/>
-          <a:p/>
+          <a:p>
+            <a:endParaRPr dirty="0"/>
+          </a:p>
         </p:txBody>
       </p:sp>
     </p:spTree>
@@ -379,7 +381,7 @@
 </file>
 
 <file path=ppt/notesSlides/notesSlide10.xml><?xml version="1.0" encoding="utf-8"?>
-<p:notes xmlns:a="http://schemas.openxmlformats.org/drawingml/2006/main" xmlns:r="http://schemas.openxmlformats.org/officeDocument/2006/relationships" xmlns:p="http://schemas.openxmlformats.org/presentationml/2006/main">
+<p:notes xmlns:a="http://schemas.openxmlformats.org/drawingml/2006/main" xmlns:ns2="http://schemas.microsoft.com/office/powerpoint/2010/main" xmlns:p="http://schemas.openxmlformats.org/presentationml/2006/main">
   <p:cSld>
     <p:spTree>
       <p:nvGrpSpPr>
@@ -421,7 +423,9 @@
         <p:txBody>
           <a:bodyPr/>
           <a:lstStyle/>
-          <a:p/>
+          <a:p>
+            <a:endParaRPr dirty="0"/>
+          </a:p>
         </p:txBody>
       </p:sp>
       <p:sp>
@@ -450,7 +454,7 @@
     </p:spTree>
     <p:extLst>
       <p:ext uri="{BB962C8B-B14F-4D97-AF65-F5344CB8AC3E}">
-        <p14:creationId xmlns:p14="http://schemas.microsoft.com/office/powerpoint/2010/main" val="1024086991"/>
+        <ns2:creationId val="1024086991"/>
       </p:ext>
     </p:extLst>
   </p:cSld>
@@ -461,7 +465,7 @@
 </file>
 
 <file path=ppt/notesSlides/notesSlide11.xml><?xml version="1.0" encoding="utf-8"?>
-<p:notes xmlns:a="http://schemas.openxmlformats.org/drawingml/2006/main" xmlns:r="http://schemas.openxmlformats.org/officeDocument/2006/relationships" xmlns:p="http://schemas.openxmlformats.org/presentationml/2006/main">
+<p:notes xmlns:a="http://schemas.openxmlformats.org/drawingml/2006/main" xmlns:ns2="http://schemas.microsoft.com/office/powerpoint/2010/main" xmlns:p="http://schemas.openxmlformats.org/presentationml/2006/main">
   <p:cSld>
     <p:spTree>
       <p:nvGrpSpPr>
@@ -503,7 +507,9 @@
         <p:txBody>
           <a:bodyPr/>
           <a:lstStyle/>
-          <a:p/>
+          <a:p>
+            <a:endParaRPr dirty="0"/>
+          </a:p>
         </p:txBody>
       </p:sp>
       <p:sp>
@@ -532,7 +538,7 @@
     </p:spTree>
     <p:extLst>
       <p:ext uri="{BB962C8B-B14F-4D97-AF65-F5344CB8AC3E}">
-        <p14:creationId xmlns:p14="http://schemas.microsoft.com/office/powerpoint/2010/main" val="1024086991"/>
+        <ns2:creationId val="1024086991"/>
       </p:ext>
     </p:extLst>
   </p:cSld>
@@ -543,7 +549,7 @@
 </file>
 
 <file path=ppt/notesSlides/notesSlide12.xml><?xml version="1.0" encoding="utf-8"?>
-<p:notes xmlns:a="http://schemas.openxmlformats.org/drawingml/2006/main" xmlns:r="http://schemas.openxmlformats.org/officeDocument/2006/relationships" xmlns:p="http://schemas.openxmlformats.org/presentationml/2006/main">
+<p:notes xmlns:a="http://schemas.openxmlformats.org/drawingml/2006/main" xmlns:ns2="http://schemas.microsoft.com/office/powerpoint/2010/main" xmlns:p="http://schemas.openxmlformats.org/presentationml/2006/main">
   <p:cSld>
     <p:spTree>
       <p:nvGrpSpPr>
@@ -585,7 +591,9 @@
         <p:txBody>
           <a:bodyPr/>
           <a:lstStyle/>
-          <a:p/>
+          <a:p>
+            <a:endParaRPr dirty="0"/>
+          </a:p>
         </p:txBody>
       </p:sp>
       <p:sp>
@@ -614,7 +622,7 @@
     </p:spTree>
     <p:extLst>
       <p:ext uri="{BB962C8B-B14F-4D97-AF65-F5344CB8AC3E}">
-        <p14:creationId xmlns:p14="http://schemas.microsoft.com/office/powerpoint/2010/main" val="1024086991"/>
+        <ns2:creationId val="1024086991"/>
       </p:ext>
     </p:extLst>
   </p:cSld>
@@ -625,7 +633,7 @@
 </file>
 
 <file path=ppt/notesSlides/notesSlide13.xml><?xml version="1.0" encoding="utf-8"?>
-<p:notes xmlns:a="http://schemas.openxmlformats.org/drawingml/2006/main" xmlns:r="http://schemas.openxmlformats.org/officeDocument/2006/relationships" xmlns:p="http://schemas.openxmlformats.org/presentationml/2006/main">
+<p:notes xmlns:a="http://schemas.openxmlformats.org/drawingml/2006/main" xmlns:ns2="http://schemas.microsoft.com/office/powerpoint/2010/main" xmlns:p="http://schemas.openxmlformats.org/presentationml/2006/main">
   <p:cSld>
     <p:spTree>
       <p:nvGrpSpPr>
@@ -667,7 +675,9 @@
         <p:txBody>
           <a:bodyPr/>
           <a:lstStyle/>
-          <a:p/>
+          <a:p>
+            <a:endParaRPr dirty="0"/>
+          </a:p>
         </p:txBody>
       </p:sp>
       <p:sp>
@@ -696,7 +706,7 @@
     </p:spTree>
     <p:extLst>
       <p:ext uri="{BB962C8B-B14F-4D97-AF65-F5344CB8AC3E}">
-        <p14:creationId xmlns:p14="http://schemas.microsoft.com/office/powerpoint/2010/main" val="1024086991"/>
+        <ns2:creationId val="1024086991"/>
       </p:ext>
     </p:extLst>
   </p:cSld>
@@ -707,7 +717,7 @@
 </file>
 
 <file path=ppt/notesSlides/notesSlide14.xml><?xml version="1.0" encoding="utf-8"?>
-<p:notes xmlns:a="http://schemas.openxmlformats.org/drawingml/2006/main" xmlns:r="http://schemas.openxmlformats.org/officeDocument/2006/relationships" xmlns:p="http://schemas.openxmlformats.org/presentationml/2006/main">
+<p:notes xmlns:a="http://schemas.openxmlformats.org/drawingml/2006/main" xmlns:ns2="http://schemas.microsoft.com/office/powerpoint/2010/main" xmlns:p="http://schemas.openxmlformats.org/presentationml/2006/main">
   <p:cSld>
     <p:spTree>
       <p:nvGrpSpPr>
@@ -749,7 +759,9 @@
         <p:txBody>
           <a:bodyPr/>
           <a:lstStyle/>
-          <a:p/>
+          <a:p>
+            <a:endParaRPr dirty="0"/>
+          </a:p>
         </p:txBody>
       </p:sp>
       <p:sp>
@@ -778,7 +790,7 @@
     </p:spTree>
     <p:extLst>
       <p:ext uri="{BB962C8B-B14F-4D97-AF65-F5344CB8AC3E}">
-        <p14:creationId xmlns:p14="http://schemas.microsoft.com/office/powerpoint/2010/main" val="1024086991"/>
+        <ns2:creationId val="1024086991"/>
       </p:ext>
     </p:extLst>
   </p:cSld>
@@ -789,7 +801,7 @@
 </file>
 
 <file path=ppt/notesSlides/notesSlide15.xml><?xml version="1.0" encoding="utf-8"?>
-<p:notes xmlns:a="http://schemas.openxmlformats.org/drawingml/2006/main" xmlns:r="http://schemas.openxmlformats.org/officeDocument/2006/relationships" xmlns:p="http://schemas.openxmlformats.org/presentationml/2006/main">
+<p:notes xmlns:a="http://schemas.openxmlformats.org/drawingml/2006/main" xmlns:ns2="http://schemas.microsoft.com/office/powerpoint/2010/main" xmlns:p="http://schemas.openxmlformats.org/presentationml/2006/main">
   <p:cSld>
     <p:spTree>
       <p:nvGrpSpPr>
@@ -831,7 +843,9 @@
         <p:txBody>
           <a:bodyPr/>
           <a:lstStyle/>
-          <a:p/>
+          <a:p>
+            <a:endParaRPr dirty="0"/>
+          </a:p>
         </p:txBody>
       </p:sp>
       <p:sp>
@@ -860,7 +874,7 @@
     </p:spTree>
     <p:extLst>
       <p:ext uri="{BB962C8B-B14F-4D97-AF65-F5344CB8AC3E}">
-        <p14:creationId xmlns:p14="http://schemas.microsoft.com/office/powerpoint/2010/main" val="1024086991"/>
+        <ns2:creationId val="1024086991"/>
       </p:ext>
     </p:extLst>
   </p:cSld>
@@ -871,7 +885,7 @@
 </file>
 
 <file path=ppt/notesSlides/notesSlide16.xml><?xml version="1.0" encoding="utf-8"?>
-<p:notes xmlns:a="http://schemas.openxmlformats.org/drawingml/2006/main" xmlns:r="http://schemas.openxmlformats.org/officeDocument/2006/relationships" xmlns:p="http://schemas.openxmlformats.org/presentationml/2006/main">
+<p:notes xmlns:a="http://schemas.openxmlformats.org/drawingml/2006/main" xmlns:ns2="http://schemas.microsoft.com/office/powerpoint/2010/main" xmlns:p="http://schemas.openxmlformats.org/presentationml/2006/main">
   <p:cSld>
     <p:spTree>
       <p:nvGrpSpPr>
@@ -913,7 +927,9 @@
         <p:txBody>
           <a:bodyPr/>
           <a:lstStyle/>
-          <a:p/>
+          <a:p>
+            <a:endParaRPr dirty="0"/>
+          </a:p>
         </p:txBody>
       </p:sp>
       <p:sp>
@@ -942,7 +958,7 @@
     </p:spTree>
     <p:extLst>
       <p:ext uri="{BB962C8B-B14F-4D97-AF65-F5344CB8AC3E}">
-        <p14:creationId xmlns:p14="http://schemas.microsoft.com/office/powerpoint/2010/main" val="1024086991"/>
+        <ns2:creationId val="1024086991"/>
       </p:ext>
     </p:extLst>
   </p:cSld>
@@ -953,7 +969,7 @@
 </file>
 
 <file path=ppt/notesSlides/notesSlide17.xml><?xml version="1.0" encoding="utf-8"?>
-<p:notes xmlns:a="http://schemas.openxmlformats.org/drawingml/2006/main" xmlns:r="http://schemas.openxmlformats.org/officeDocument/2006/relationships" xmlns:p="http://schemas.openxmlformats.org/presentationml/2006/main">
+<p:notes xmlns:a="http://schemas.openxmlformats.org/drawingml/2006/main" xmlns:ns2="http://schemas.microsoft.com/office/powerpoint/2010/main" xmlns:p="http://schemas.openxmlformats.org/presentationml/2006/main">
   <p:cSld>
     <p:spTree>
       <p:nvGrpSpPr>
@@ -995,7 +1011,9 @@
         <p:txBody>
           <a:bodyPr/>
           <a:lstStyle/>
-          <a:p/>
+          <a:p>
+            <a:endParaRPr dirty="0"/>
+          </a:p>
         </p:txBody>
       </p:sp>
       <p:sp>
@@ -1024,7 +1042,7 @@
     </p:spTree>
     <p:extLst>
       <p:ext uri="{BB962C8B-B14F-4D97-AF65-F5344CB8AC3E}">
-        <p14:creationId xmlns:p14="http://schemas.microsoft.com/office/powerpoint/2010/main" val="1024086991"/>
+        <ns2:creationId val="1024086991"/>
       </p:ext>
     </p:extLst>
   </p:cSld>
@@ -1035,7 +1053,7 @@
 </file>
 
 <file path=ppt/notesSlides/notesSlide18.xml><?xml version="1.0" encoding="utf-8"?>
-<p:notes xmlns:a="http://schemas.openxmlformats.org/drawingml/2006/main" xmlns:r="http://schemas.openxmlformats.org/officeDocument/2006/relationships" xmlns:p="http://schemas.openxmlformats.org/presentationml/2006/main">
+<p:notes xmlns:a="http://schemas.openxmlformats.org/drawingml/2006/main" xmlns:ns2="http://schemas.microsoft.com/office/powerpoint/2010/main" xmlns:p="http://schemas.openxmlformats.org/presentationml/2006/main">
   <p:cSld>
     <p:spTree>
       <p:nvGrpSpPr>
@@ -1077,7 +1095,9 @@
         <p:txBody>
           <a:bodyPr/>
           <a:lstStyle/>
-          <a:p/>
+          <a:p>
+            <a:endParaRPr dirty="0"/>
+          </a:p>
         </p:txBody>
       </p:sp>
       <p:sp>
@@ -1106,7 +1126,7 @@
     </p:spTree>
     <p:extLst>
       <p:ext uri="{BB962C8B-B14F-4D97-AF65-F5344CB8AC3E}">
-        <p14:creationId xmlns:p14="http://schemas.microsoft.com/office/powerpoint/2010/main" val="1024086991"/>
+        <ns2:creationId val="1024086991"/>
       </p:ext>
     </p:extLst>
   </p:cSld>
@@ -1117,7 +1137,7 @@
 </file>
 
 <file path=ppt/notesSlides/notesSlide19.xml><?xml version="1.0" encoding="utf-8"?>
-<p:notes xmlns:a="http://schemas.openxmlformats.org/drawingml/2006/main" xmlns:r="http://schemas.openxmlformats.org/officeDocument/2006/relationships" xmlns:p="http://schemas.openxmlformats.org/presentationml/2006/main">
+<p:notes xmlns:a="http://schemas.openxmlformats.org/drawingml/2006/main" xmlns:ns2="http://schemas.microsoft.com/office/powerpoint/2010/main" xmlns:p="http://schemas.openxmlformats.org/presentationml/2006/main">
   <p:cSld>
     <p:spTree>
       <p:nvGrpSpPr>
@@ -1159,7 +1179,9 @@
         <p:txBody>
           <a:bodyPr/>
           <a:lstStyle/>
-          <a:p/>
+          <a:p>
+            <a:endParaRPr dirty="0"/>
+          </a:p>
         </p:txBody>
       </p:sp>
       <p:sp>
@@ -1188,7 +1210,7 @@
     </p:spTree>
     <p:extLst>
       <p:ext uri="{BB962C8B-B14F-4D97-AF65-F5344CB8AC3E}">
-        <p14:creationId xmlns:p14="http://schemas.microsoft.com/office/powerpoint/2010/main" val="1024086991"/>
+        <ns2:creationId val="1024086991"/>
       </p:ext>
     </p:extLst>
   </p:cSld>
@@ -1199,7 +1221,7 @@
 </file>
 
 <file path=ppt/notesSlides/notesSlide2.xml><?xml version="1.0" encoding="utf-8"?>
-<p:notes xmlns:a="http://schemas.openxmlformats.org/drawingml/2006/main" xmlns:r="http://schemas.openxmlformats.org/officeDocument/2006/relationships" xmlns:p="http://schemas.openxmlformats.org/presentationml/2006/main">
+<p:notes xmlns:a="http://schemas.openxmlformats.org/drawingml/2006/main" xmlns:ns2="http://schemas.microsoft.com/office/powerpoint/2010/main" xmlns:p="http://schemas.openxmlformats.org/presentationml/2006/main">
   <p:cSld>
     <p:spTree>
       <p:nvGrpSpPr>
@@ -1272,7 +1294,7 @@
     </p:spTree>
     <p:extLst>
       <p:ext uri="{BB962C8B-B14F-4D97-AF65-F5344CB8AC3E}">
-        <p14:creationId xmlns:p14="http://schemas.microsoft.com/office/powerpoint/2010/main" val="1024086991"/>
+        <ns2:creationId val="1024086991"/>
       </p:ext>
     </p:extLst>
   </p:cSld>
@@ -1283,7 +1305,7 @@
 </file>
 
 <file path=ppt/notesSlides/notesSlide20.xml><?xml version="1.0" encoding="utf-8"?>
-<p:notes xmlns:a="http://schemas.openxmlformats.org/drawingml/2006/main" xmlns:r="http://schemas.openxmlformats.org/officeDocument/2006/relationships" xmlns:p="http://schemas.openxmlformats.org/presentationml/2006/main">
+<p:notes xmlns:a="http://schemas.openxmlformats.org/drawingml/2006/main" xmlns:ns2="http://schemas.microsoft.com/office/powerpoint/2010/main" xmlns:p="http://schemas.openxmlformats.org/presentationml/2006/main">
   <p:cSld>
     <p:spTree>
       <p:nvGrpSpPr>
@@ -1325,7 +1347,9 @@
         <p:txBody>
           <a:bodyPr/>
           <a:lstStyle/>
-          <a:p/>
+          <a:p>
+            <a:endParaRPr dirty="0"/>
+          </a:p>
         </p:txBody>
       </p:sp>
       <p:sp>
@@ -1354,7 +1378,7 @@
     </p:spTree>
     <p:extLst>
       <p:ext uri="{BB962C8B-B14F-4D97-AF65-F5344CB8AC3E}">
-        <p14:creationId xmlns:p14="http://schemas.microsoft.com/office/powerpoint/2010/main" val="1024086991"/>
+        <ns2:creationId val="1024086991"/>
       </p:ext>
     </p:extLst>
   </p:cSld>
@@ -1365,7 +1389,7 @@
 </file>
 
 <file path=ppt/notesSlides/notesSlide21.xml><?xml version="1.0" encoding="utf-8"?>
-<p:notes xmlns:a="http://schemas.openxmlformats.org/drawingml/2006/main" xmlns:r="http://schemas.openxmlformats.org/officeDocument/2006/relationships" xmlns:p="http://schemas.openxmlformats.org/presentationml/2006/main">
+<p:notes xmlns:a="http://schemas.openxmlformats.org/drawingml/2006/main" xmlns:ns2="http://schemas.microsoft.com/office/powerpoint/2010/main" xmlns:p="http://schemas.openxmlformats.org/presentationml/2006/main">
   <p:cSld>
     <p:spTree>
       <p:nvGrpSpPr>
@@ -1407,7 +1431,9 @@
         <p:txBody>
           <a:bodyPr/>
           <a:lstStyle/>
-          <a:p/>
+          <a:p>
+            <a:endParaRPr dirty="0"/>
+          </a:p>
         </p:txBody>
       </p:sp>
       <p:sp>
@@ -1436,7 +1462,7 @@
     </p:spTree>
     <p:extLst>
       <p:ext uri="{BB962C8B-B14F-4D97-AF65-F5344CB8AC3E}">
-        <p14:creationId xmlns:p14="http://schemas.microsoft.com/office/powerpoint/2010/main" val="2563893189"/>
+        <ns2:creationId val="2563893189"/>
       </p:ext>
     </p:extLst>
   </p:cSld>
@@ -1447,7 +1473,7 @@
 </file>
 
 <file path=ppt/notesSlides/notesSlide22.xml><?xml version="1.0" encoding="utf-8"?>
-<p:notes xmlns:a="http://schemas.openxmlformats.org/drawingml/2006/main" xmlns:r="http://schemas.openxmlformats.org/officeDocument/2006/relationships" xmlns:p="http://schemas.openxmlformats.org/presentationml/2006/main">
+<p:notes xmlns:a="http://schemas.openxmlformats.org/drawingml/2006/main" xmlns:ns2="http://schemas.microsoft.com/office/powerpoint/2010/main" xmlns:p="http://schemas.openxmlformats.org/presentationml/2006/main">
   <p:cSld>
     <p:spTree>
       <p:nvGrpSpPr>
@@ -1489,7 +1515,9 @@
         <p:txBody>
           <a:bodyPr/>
           <a:lstStyle/>
-          <a:p/>
+          <a:p>
+            <a:endParaRPr dirty="0"/>
+          </a:p>
         </p:txBody>
       </p:sp>
       <p:sp>
@@ -1518,7 +1546,7 @@
     </p:spTree>
     <p:extLst>
       <p:ext uri="{BB962C8B-B14F-4D97-AF65-F5344CB8AC3E}">
-        <p14:creationId xmlns:p14="http://schemas.microsoft.com/office/powerpoint/2010/main" val="1847383201"/>
+        <ns2:creationId val="1847383201"/>
       </p:ext>
     </p:extLst>
   </p:cSld>
@@ -1529,7 +1557,7 @@
 </file>
 
 <file path=ppt/notesSlides/notesSlide23.xml><?xml version="1.0" encoding="utf-8"?>
-<p:notes xmlns:a="http://schemas.openxmlformats.org/drawingml/2006/main" xmlns:r="http://schemas.openxmlformats.org/officeDocument/2006/relationships" xmlns:p="http://schemas.openxmlformats.org/presentationml/2006/main">
+<p:notes xmlns:a="http://schemas.openxmlformats.org/drawingml/2006/main" xmlns:ns2="http://schemas.microsoft.com/office/powerpoint/2010/main" xmlns:p="http://schemas.openxmlformats.org/presentationml/2006/main">
   <p:cSld>
     <p:spTree>
       <p:nvGrpSpPr>
@@ -1571,7 +1599,9 @@
         <p:txBody>
           <a:bodyPr/>
           <a:lstStyle/>
-          <a:p/>
+          <a:p>
+            <a:endParaRPr dirty="0"/>
+          </a:p>
         </p:txBody>
       </p:sp>
       <p:sp>
@@ -1600,7 +1630,7 @@
     </p:spTree>
     <p:extLst>
       <p:ext uri="{BB962C8B-B14F-4D97-AF65-F5344CB8AC3E}">
-        <p14:creationId xmlns:p14="http://schemas.microsoft.com/office/powerpoint/2010/main" val="3779556956"/>
+        <ns2:creationId val="3779556956"/>
       </p:ext>
     </p:extLst>
   </p:cSld>
@@ -1611,7 +1641,7 @@
 </file>
 
 <file path=ppt/notesSlides/notesSlide24.xml><?xml version="1.0" encoding="utf-8"?>
-<p:notes xmlns:a="http://schemas.openxmlformats.org/drawingml/2006/main" xmlns:r="http://schemas.openxmlformats.org/officeDocument/2006/relationships" xmlns:p="http://schemas.openxmlformats.org/presentationml/2006/main">
+<p:notes xmlns:a="http://schemas.openxmlformats.org/drawingml/2006/main" xmlns:ns2="http://schemas.microsoft.com/office/powerpoint/2010/main" xmlns:p="http://schemas.openxmlformats.org/presentationml/2006/main">
   <p:cSld>
     <p:spTree>
       <p:nvGrpSpPr>
@@ -1653,7 +1683,9 @@
         <p:txBody>
           <a:bodyPr/>
           <a:lstStyle/>
-          <a:p/>
+          <a:p>
+            <a:endParaRPr dirty="0"/>
+          </a:p>
         </p:txBody>
       </p:sp>
       <p:sp>
@@ -1682,7 +1714,7 @@
     </p:spTree>
     <p:extLst>
       <p:ext uri="{BB962C8B-B14F-4D97-AF65-F5344CB8AC3E}">
-        <p14:creationId xmlns:p14="http://schemas.microsoft.com/office/powerpoint/2010/main" val="1024086991"/>
+        <ns2:creationId val="1024086991"/>
       </p:ext>
     </p:extLst>
   </p:cSld>
@@ -1693,7 +1725,7 @@
 </file>
 
 <file path=ppt/notesSlides/notesSlide25.xml><?xml version="1.0" encoding="utf-8"?>
-<p:notes xmlns:a="http://schemas.openxmlformats.org/drawingml/2006/main" xmlns:r="http://schemas.openxmlformats.org/officeDocument/2006/relationships" xmlns:p="http://schemas.openxmlformats.org/presentationml/2006/main">
+<p:notes xmlns:a="http://schemas.openxmlformats.org/drawingml/2006/main" xmlns:ns2="http://schemas.microsoft.com/office/powerpoint/2010/main" xmlns:p="http://schemas.openxmlformats.org/presentationml/2006/main">
   <p:cSld>
     <p:spTree>
       <p:nvGrpSpPr>
@@ -1735,7 +1767,9 @@
         <p:txBody>
           <a:bodyPr/>
           <a:lstStyle/>
-          <a:p/>
+          <a:p>
+            <a:endParaRPr dirty="0"/>
+          </a:p>
         </p:txBody>
       </p:sp>
       <p:sp>
@@ -1764,7 +1798,7 @@
     </p:spTree>
     <p:extLst>
       <p:ext uri="{BB962C8B-B14F-4D97-AF65-F5344CB8AC3E}">
-        <p14:creationId xmlns:p14="http://schemas.microsoft.com/office/powerpoint/2010/main" val="1024086991"/>
+        <ns2:creationId val="1024086991"/>
       </p:ext>
     </p:extLst>
   </p:cSld>
@@ -1775,7 +1809,7 @@
 </file>
 
 <file path=ppt/notesSlides/notesSlide26.xml><?xml version="1.0" encoding="utf-8"?>
-<p:notes xmlns:a="http://schemas.openxmlformats.org/drawingml/2006/main" xmlns:r="http://schemas.openxmlformats.org/officeDocument/2006/relationships" xmlns:p="http://schemas.openxmlformats.org/presentationml/2006/main">
+<p:notes xmlns:a="http://schemas.openxmlformats.org/drawingml/2006/main" xmlns:ns2="http://schemas.microsoft.com/office/powerpoint/2010/main" xmlns:p="http://schemas.openxmlformats.org/presentationml/2006/main">
   <p:cSld>
     <p:spTree>
       <p:nvGrpSpPr>
@@ -1817,7 +1851,9 @@
         <p:txBody>
           <a:bodyPr/>
           <a:lstStyle/>
-          <a:p/>
+          <a:p>
+            <a:endParaRPr dirty="0"/>
+          </a:p>
         </p:txBody>
       </p:sp>
       <p:sp>
@@ -1846,7 +1882,7 @@
     </p:spTree>
     <p:extLst>
       <p:ext uri="{BB962C8B-B14F-4D97-AF65-F5344CB8AC3E}">
-        <p14:creationId xmlns:p14="http://schemas.microsoft.com/office/powerpoint/2010/main" val="1024086991"/>
+        <ns2:creationId val="1024086991"/>
       </p:ext>
     </p:extLst>
   </p:cSld>
@@ -1857,7 +1893,7 @@
 </file>
 
 <file path=ppt/notesSlides/notesSlide27.xml><?xml version="1.0" encoding="utf-8"?>
-<p:notes xmlns:a="http://schemas.openxmlformats.org/drawingml/2006/main" xmlns:r="http://schemas.openxmlformats.org/officeDocument/2006/relationships" xmlns:p="http://schemas.openxmlformats.org/presentationml/2006/main">
+<p:notes xmlns:a="http://schemas.openxmlformats.org/drawingml/2006/main" xmlns:ns2="http://schemas.microsoft.com/office/powerpoint/2010/main" xmlns:p="http://schemas.openxmlformats.org/presentationml/2006/main">
   <p:cSld>
     <p:spTree>
       <p:nvGrpSpPr>
@@ -1899,7 +1935,9 @@
         <p:txBody>
           <a:bodyPr/>
           <a:lstStyle/>
-          <a:p/>
+          <a:p>
+            <a:endParaRPr dirty="0"/>
+          </a:p>
         </p:txBody>
       </p:sp>
       <p:sp>
@@ -1928,7 +1966,7 @@
     </p:spTree>
     <p:extLst>
       <p:ext uri="{BB962C8B-B14F-4D97-AF65-F5344CB8AC3E}">
-        <p14:creationId xmlns:p14="http://schemas.microsoft.com/office/powerpoint/2010/main" val="2183509847"/>
+        <ns2:creationId val="2183509847"/>
       </p:ext>
     </p:extLst>
   </p:cSld>
@@ -1939,7 +1977,7 @@
 </file>
 
 <file path=ppt/notesSlides/notesSlide28.xml><?xml version="1.0" encoding="utf-8"?>
-<p:notes xmlns:a="http://schemas.openxmlformats.org/drawingml/2006/main" xmlns:r="http://schemas.openxmlformats.org/officeDocument/2006/relationships" xmlns:p="http://schemas.openxmlformats.org/presentationml/2006/main">
+<p:notes xmlns:a="http://schemas.openxmlformats.org/drawingml/2006/main" xmlns:ns2="http://schemas.microsoft.com/office/powerpoint/2010/main" xmlns:p="http://schemas.openxmlformats.org/presentationml/2006/main">
   <p:cSld>
     <p:spTree>
       <p:nvGrpSpPr>
@@ -1981,7 +2019,9 @@
         <p:txBody>
           <a:bodyPr/>
           <a:lstStyle/>
-          <a:p/>
+          <a:p>
+            <a:endParaRPr dirty="0"/>
+          </a:p>
         </p:txBody>
       </p:sp>
       <p:sp>
@@ -2010,7 +2050,7 @@
     </p:spTree>
     <p:extLst>
       <p:ext uri="{BB962C8B-B14F-4D97-AF65-F5344CB8AC3E}">
-        <p14:creationId xmlns:p14="http://schemas.microsoft.com/office/powerpoint/2010/main" val="1024086991"/>
+        <ns2:creationId val="1024086991"/>
       </p:ext>
     </p:extLst>
   </p:cSld>
@@ -2021,14 +2061,14 @@
 </file>
 
 <file path=ppt/notesSlides/notesSlide29.xml><?xml version="1.0" encoding="utf-8"?>
-<p:notes xmlns:a="http://schemas.openxmlformats.org/drawingml/2006/main" xmlns:r="http://schemas.openxmlformats.org/officeDocument/2006/relationships" xmlns:p="http://schemas.openxmlformats.org/presentationml/2006/main">
+<p:notes xmlns:a="http://schemas.openxmlformats.org/drawingml/2006/main" xmlns:ns2="http://schemas.microsoft.com/office/drawing/2014/main" xmlns:ns3="http://schemas.microsoft.com/office/powerpoint/2010/main" xmlns:p="http://schemas.openxmlformats.org/presentationml/2006/main">
   <p:cSld>
     <p:spTree>
       <p:nvGrpSpPr>
         <p:cNvPr id="1" name="">
           <a:extLst>
             <a:ext uri="{FF2B5EF4-FFF2-40B4-BE49-F238E27FC236}">
-              <a16:creationId xmlns:a16="http://schemas.microsoft.com/office/drawing/2014/main" id="{8E56279F-FB76-40C7-49AD-D4B1F65B119A}"/>
+              <ns2:creationId id="{8E56279F-FB76-40C7-49AD-D4B1F65B119A}"/>
             </a:ext>
           </a:extLst>
         </p:cNvPr>
@@ -2048,7 +2088,7 @@
           <p:cNvPr id="2" name="Slide Image Placeholder 1">
             <a:extLst>
               <a:ext uri="{FF2B5EF4-FFF2-40B4-BE49-F238E27FC236}">
-                <a16:creationId xmlns:a16="http://schemas.microsoft.com/office/drawing/2014/main" id="{30853ADD-84AD-54A0-D271-179B671E5808}"/>
+                <ns2:creationId id="{30853ADD-84AD-54A0-D271-179B671E5808}"/>
               </a:ext>
             </a:extLst>
           </p:cNvPr>
@@ -2066,7 +2106,7 @@
           <p:cNvPr id="3" name="Notes Placeholder 2">
             <a:extLst>
               <a:ext uri="{FF2B5EF4-FFF2-40B4-BE49-F238E27FC236}">
-                <a16:creationId xmlns:a16="http://schemas.microsoft.com/office/drawing/2014/main" id="{0B4945EC-A12D-F1CD-78B7-E2ACAA89B1A8}"/>
+                <ns2:creationId id="{0B4945EC-A12D-F1CD-78B7-E2ACAA89B1A8}"/>
               </a:ext>
             </a:extLst>
           </p:cNvPr>
@@ -2081,7 +2121,9 @@
         <p:txBody>
           <a:bodyPr/>
           <a:lstStyle/>
-          <a:p/>
+          <a:p>
+            <a:endParaRPr dirty="0"/>
+          </a:p>
         </p:txBody>
       </p:sp>
       <p:sp>
@@ -2089,7 +2131,7 @@
           <p:cNvPr id="4" name="Slide Number Placeholder 3">
             <a:extLst>
               <a:ext uri="{FF2B5EF4-FFF2-40B4-BE49-F238E27FC236}">
-                <a16:creationId xmlns:a16="http://schemas.microsoft.com/office/drawing/2014/main" id="{4E38000A-03CF-5EBD-E626-5CAB7B14F873}"/>
+                <ns2:creationId id="{4E38000A-03CF-5EBD-E626-5CAB7B14F873}"/>
               </a:ext>
             </a:extLst>
           </p:cNvPr>
@@ -2116,7 +2158,7 @@
     </p:spTree>
     <p:extLst>
       <p:ext uri="{BB962C8B-B14F-4D97-AF65-F5344CB8AC3E}">
-        <p14:creationId xmlns:p14="http://schemas.microsoft.com/office/powerpoint/2010/main" val="446077213"/>
+        <ns3:creationId val="446077213"/>
       </p:ext>
     </p:extLst>
   </p:cSld>
@@ -2127,7 +2169,7 @@
 </file>
 
 <file path=ppt/notesSlides/notesSlide3.xml><?xml version="1.0" encoding="utf-8"?>
-<p:notes xmlns:a="http://schemas.openxmlformats.org/drawingml/2006/main" xmlns:r="http://schemas.openxmlformats.org/officeDocument/2006/relationships" xmlns:p="http://schemas.openxmlformats.org/presentationml/2006/main">
+<p:notes xmlns:a="http://schemas.openxmlformats.org/drawingml/2006/main" xmlns:ns2="http://schemas.microsoft.com/office/powerpoint/2010/main" xmlns:p="http://schemas.openxmlformats.org/presentationml/2006/main">
   <p:cSld>
     <p:spTree>
       <p:nvGrpSpPr>
@@ -2169,7 +2211,9 @@
         <p:txBody>
           <a:bodyPr/>
           <a:lstStyle/>
-          <a:p/>
+          <a:p>
+            <a:endParaRPr dirty="0"/>
+          </a:p>
         </p:txBody>
       </p:sp>
       <p:sp>
@@ -2198,7 +2242,7 @@
     </p:spTree>
     <p:extLst>
       <p:ext uri="{BB962C8B-B14F-4D97-AF65-F5344CB8AC3E}">
-        <p14:creationId xmlns:p14="http://schemas.microsoft.com/office/powerpoint/2010/main" val="1129510118"/>
+        <ns2:creationId val="1129510118"/>
       </p:ext>
     </p:extLst>
   </p:cSld>
@@ -2209,7 +2253,7 @@
 </file>
 
 <file path=ppt/notesSlides/notesSlide30.xml><?xml version="1.0" encoding="utf-8"?>
-<p:notes xmlns:a="http://schemas.openxmlformats.org/drawingml/2006/main" xmlns:r="http://schemas.openxmlformats.org/officeDocument/2006/relationships" xmlns:p="http://schemas.openxmlformats.org/presentationml/2006/main">
+<p:notes xmlns:a="http://schemas.openxmlformats.org/drawingml/2006/main" xmlns:ns2="http://schemas.microsoft.com/office/powerpoint/2010/main" xmlns:p="http://schemas.openxmlformats.org/presentationml/2006/main">
   <p:cSld>
     <p:spTree>
       <p:nvGrpSpPr>
@@ -2251,7 +2295,9 @@
         <p:txBody>
           <a:bodyPr/>
           <a:lstStyle/>
-          <a:p/>
+          <a:p>
+            <a:endParaRPr dirty="0"/>
+          </a:p>
         </p:txBody>
       </p:sp>
       <p:sp>
@@ -2280,7 +2326,7 @@
     </p:spTree>
     <p:extLst>
       <p:ext uri="{BB962C8B-B14F-4D97-AF65-F5344CB8AC3E}">
-        <p14:creationId xmlns:p14="http://schemas.microsoft.com/office/powerpoint/2010/main" val="1024086991"/>
+        <ns2:creationId val="1024086991"/>
       </p:ext>
     </p:extLst>
   </p:cSld>
@@ -2291,7 +2337,7 @@
 </file>
 
 <file path=ppt/notesSlides/notesSlide31.xml><?xml version="1.0" encoding="utf-8"?>
-<p:notes xmlns:a="http://schemas.openxmlformats.org/drawingml/2006/main" xmlns:r="http://schemas.openxmlformats.org/officeDocument/2006/relationships" xmlns:p="http://schemas.openxmlformats.org/presentationml/2006/main">
+<p:notes xmlns:a="http://schemas.openxmlformats.org/drawingml/2006/main" xmlns:ns2="http://schemas.microsoft.com/office/powerpoint/2010/main" xmlns:p="http://schemas.openxmlformats.org/presentationml/2006/main">
   <p:cSld>
     <p:spTree>
       <p:nvGrpSpPr>
@@ -2333,7 +2379,9 @@
         <p:txBody>
           <a:bodyPr/>
           <a:lstStyle/>
-          <a:p/>
+          <a:p>
+            <a:endParaRPr dirty="0"/>
+          </a:p>
         </p:txBody>
       </p:sp>
       <p:sp>
@@ -2362,7 +2410,7 @@
     </p:spTree>
     <p:extLst>
       <p:ext uri="{BB962C8B-B14F-4D97-AF65-F5344CB8AC3E}">
-        <p14:creationId xmlns:p14="http://schemas.microsoft.com/office/powerpoint/2010/main" val="1024086991"/>
+        <ns2:creationId val="1024086991"/>
       </p:ext>
     </p:extLst>
   </p:cSld>
@@ -2373,7 +2421,7 @@
 </file>
 
 <file path=ppt/notesSlides/notesSlide32.xml><?xml version="1.0" encoding="utf-8"?>
-<p:notes xmlns:a="http://schemas.openxmlformats.org/drawingml/2006/main" xmlns:r="http://schemas.openxmlformats.org/officeDocument/2006/relationships" xmlns:p="http://schemas.openxmlformats.org/presentationml/2006/main" showMasterSp="0" showMasterPhAnim="0">
+<p:notes xmlns:a="http://schemas.openxmlformats.org/drawingml/2006/main" xmlns:p="http://schemas.openxmlformats.org/presentationml/2006/main" showMasterSp="0" showMasterPhAnim="0">
   <p:cSld>
     <p:spTree>
       <p:nvGrpSpPr>
@@ -2468,7 +2516,9 @@
             <a:noAutofit/>
           </a:bodyPr>
           <a:lstStyle/>
-          <a:p/>
+          <a:p>
+            <a:endParaRPr dirty="0"/>
+          </a:p>
         </p:txBody>
       </p:sp>
     </p:spTree>
@@ -2480,7 +2530,7 @@
 </file>
 
 <file path=ppt/notesSlides/notesSlide4.xml><?xml version="1.0" encoding="utf-8"?>
-<p:notes xmlns:a="http://schemas.openxmlformats.org/drawingml/2006/main" xmlns:r="http://schemas.openxmlformats.org/officeDocument/2006/relationships" xmlns:p="http://schemas.openxmlformats.org/presentationml/2006/main">
+<p:notes xmlns:a="http://schemas.openxmlformats.org/drawingml/2006/main" xmlns:ns2="http://schemas.microsoft.com/office/powerpoint/2010/main" xmlns:p="http://schemas.openxmlformats.org/presentationml/2006/main">
   <p:cSld>
     <p:spTree>
       <p:nvGrpSpPr>
@@ -2522,7 +2572,9 @@
         <p:txBody>
           <a:bodyPr/>
           <a:lstStyle/>
-          <a:p/>
+          <a:p>
+            <a:endParaRPr dirty="0"/>
+          </a:p>
         </p:txBody>
       </p:sp>
       <p:sp>
@@ -2551,7 +2603,7 @@
     </p:spTree>
     <p:extLst>
       <p:ext uri="{BB962C8B-B14F-4D97-AF65-F5344CB8AC3E}">
-        <p14:creationId xmlns:p14="http://schemas.microsoft.com/office/powerpoint/2010/main" val="2722268846"/>
+        <ns2:creationId val="2722268846"/>
       </p:ext>
     </p:extLst>
   </p:cSld>
@@ -2562,7 +2614,7 @@
 </file>
 
 <file path=ppt/notesSlides/notesSlide5.xml><?xml version="1.0" encoding="utf-8"?>
-<p:notes xmlns:a="http://schemas.openxmlformats.org/drawingml/2006/main" xmlns:r="http://schemas.openxmlformats.org/officeDocument/2006/relationships" xmlns:p="http://schemas.openxmlformats.org/presentationml/2006/main">
+<p:notes xmlns:a="http://schemas.openxmlformats.org/drawingml/2006/main" xmlns:ns2="http://schemas.microsoft.com/office/powerpoint/2010/main" xmlns:p="http://schemas.openxmlformats.org/presentationml/2006/main">
   <p:cSld>
     <p:spTree>
       <p:nvGrpSpPr>
@@ -2604,7 +2656,9 @@
         <p:txBody>
           <a:bodyPr/>
           <a:lstStyle/>
-          <a:p/>
+          <a:p>
+            <a:endParaRPr dirty="0"/>
+          </a:p>
         </p:txBody>
       </p:sp>
       <p:sp>
@@ -2633,7 +2687,7 @@
     </p:spTree>
     <p:extLst>
       <p:ext uri="{BB962C8B-B14F-4D97-AF65-F5344CB8AC3E}">
-        <p14:creationId xmlns:p14="http://schemas.microsoft.com/office/powerpoint/2010/main" val="1024086991"/>
+        <ns2:creationId val="1024086991"/>
       </p:ext>
     </p:extLst>
   </p:cSld>
@@ -2644,7 +2698,7 @@
 </file>
 
 <file path=ppt/notesSlides/notesSlide6.xml><?xml version="1.0" encoding="utf-8"?>
-<p:notes xmlns:a="http://schemas.openxmlformats.org/drawingml/2006/main" xmlns:r="http://schemas.openxmlformats.org/officeDocument/2006/relationships" xmlns:p="http://schemas.openxmlformats.org/presentationml/2006/main">
+<p:notes xmlns:a="http://schemas.openxmlformats.org/drawingml/2006/main" xmlns:ns2="http://schemas.microsoft.com/office/powerpoint/2010/main" xmlns:p="http://schemas.openxmlformats.org/presentationml/2006/main">
   <p:cSld>
     <p:spTree>
       <p:nvGrpSpPr>
@@ -2686,7 +2740,9 @@
         <p:txBody>
           <a:bodyPr/>
           <a:lstStyle/>
-          <a:p/>
+          <a:p>
+            <a:endParaRPr dirty="0"/>
+          </a:p>
         </p:txBody>
       </p:sp>
       <p:sp>
@@ -2715,7 +2771,7 @@
     </p:spTree>
     <p:extLst>
       <p:ext uri="{BB962C8B-B14F-4D97-AF65-F5344CB8AC3E}">
-        <p14:creationId xmlns:p14="http://schemas.microsoft.com/office/powerpoint/2010/main" val="3600036969"/>
+        <ns2:creationId val="3600036969"/>
       </p:ext>
     </p:extLst>
   </p:cSld>
@@ -2726,7 +2782,7 @@
 </file>
 
 <file path=ppt/notesSlides/notesSlide7.xml><?xml version="1.0" encoding="utf-8"?>
-<p:notes xmlns:a="http://schemas.openxmlformats.org/drawingml/2006/main" xmlns:r="http://schemas.openxmlformats.org/officeDocument/2006/relationships" xmlns:p="http://schemas.openxmlformats.org/presentationml/2006/main">
+<p:notes xmlns:a="http://schemas.openxmlformats.org/drawingml/2006/main" xmlns:ns2="http://schemas.microsoft.com/office/powerpoint/2010/main" xmlns:p="http://schemas.openxmlformats.org/presentationml/2006/main">
   <p:cSld>
     <p:spTree>
       <p:nvGrpSpPr>
@@ -2768,7 +2824,9 @@
         <p:txBody>
           <a:bodyPr/>
           <a:lstStyle/>
-          <a:p/>
+          <a:p>
+            <a:endParaRPr dirty="0"/>
+          </a:p>
         </p:txBody>
       </p:sp>
       <p:sp>
@@ -2797,7 +2855,7 @@
     </p:spTree>
     <p:extLst>
       <p:ext uri="{BB962C8B-B14F-4D97-AF65-F5344CB8AC3E}">
-        <p14:creationId xmlns:p14="http://schemas.microsoft.com/office/powerpoint/2010/main" val="1024086991"/>
+        <ns2:creationId val="1024086991"/>
       </p:ext>
     </p:extLst>
   </p:cSld>
@@ -2808,7 +2866,7 @@
 </file>
 
 <file path=ppt/notesSlides/notesSlide8.xml><?xml version="1.0" encoding="utf-8"?>
-<p:notes xmlns:a="http://schemas.openxmlformats.org/drawingml/2006/main" xmlns:r="http://schemas.openxmlformats.org/officeDocument/2006/relationships" xmlns:p="http://schemas.openxmlformats.org/presentationml/2006/main">
+<p:notes xmlns:a="http://schemas.openxmlformats.org/drawingml/2006/main" xmlns:ns2="http://schemas.microsoft.com/office/powerpoint/2010/main" xmlns:p="http://schemas.openxmlformats.org/presentationml/2006/main">
   <p:cSld>
     <p:spTree>
       <p:nvGrpSpPr>
@@ -2850,7 +2908,9 @@
         <p:txBody>
           <a:bodyPr/>
           <a:lstStyle/>
-          <a:p/>
+          <a:p>
+            <a:endParaRPr dirty="0"/>
+          </a:p>
         </p:txBody>
       </p:sp>
       <p:sp>
@@ -2879,7 +2939,7 @@
     </p:spTree>
     <p:extLst>
       <p:ext uri="{BB962C8B-B14F-4D97-AF65-F5344CB8AC3E}">
-        <p14:creationId xmlns:p14="http://schemas.microsoft.com/office/powerpoint/2010/main" val="1024086991"/>
+        <ns2:creationId val="1024086991"/>
       </p:ext>
     </p:extLst>
   </p:cSld>
@@ -2890,7 +2950,7 @@
 </file>
 
 <file path=ppt/notesSlides/notesSlide9.xml><?xml version="1.0" encoding="utf-8"?>
-<p:notes xmlns:a="http://schemas.openxmlformats.org/drawingml/2006/main" xmlns:r="http://schemas.openxmlformats.org/officeDocument/2006/relationships" xmlns:p="http://schemas.openxmlformats.org/presentationml/2006/main">
+<p:notes xmlns:a="http://schemas.openxmlformats.org/drawingml/2006/main" xmlns:ns2="http://schemas.microsoft.com/office/powerpoint/2010/main" xmlns:p="http://schemas.openxmlformats.org/presentationml/2006/main">
   <p:cSld>
     <p:spTree>
       <p:nvGrpSpPr>
@@ -2932,7 +2992,9 @@
         <p:txBody>
           <a:bodyPr/>
           <a:lstStyle/>
-          <a:p/>
+          <a:p>
+            <a:endParaRPr dirty="0"/>
+          </a:p>
         </p:txBody>
       </p:sp>
       <p:sp>
@@ -2961,7 +3023,7 @@
     </p:spTree>
     <p:extLst>
       <p:ext uri="{BB962C8B-B14F-4D97-AF65-F5344CB8AC3E}">
-        <p14:creationId xmlns:p14="http://schemas.microsoft.com/office/powerpoint/2010/main" val="1024086991"/>
+        <ns2:creationId val="1024086991"/>
       </p:ext>
     </p:extLst>
   </p:cSld>
